--- a/first_report_noise_seg.pptx
+++ b/first_report_noise_seg.pptx
@@ -5,7 +5,7 @@
     <p:sldMasterId id="2147483659" r:id="rId1"/>
   </p:sldMasterIdLst>
   <p:notesMasterIdLst>
-    <p:notesMasterId r:id="rId18"/>
+    <p:notesMasterId r:id="rId19"/>
   </p:notesMasterIdLst>
   <p:sldIdLst>
     <p:sldId id="256" r:id="rId2"/>
@@ -21,9 +21,10 @@
     <p:sldId id="261" r:id="rId12"/>
     <p:sldId id="271" r:id="rId13"/>
     <p:sldId id="262" r:id="rId14"/>
-    <p:sldId id="263" r:id="rId15"/>
-    <p:sldId id="264" r:id="rId16"/>
-    <p:sldId id="272" r:id="rId17"/>
+    <p:sldId id="273" r:id="rId15"/>
+    <p:sldId id="263" r:id="rId16"/>
+    <p:sldId id="264" r:id="rId17"/>
+    <p:sldId id="272" r:id="rId18"/>
   </p:sldIdLst>
   <p:sldSz cx="9144000" cy="5143500" type="screen16x9"/>
   <p:notesSz cx="6858000" cy="9144000"/>
@@ -1315,6 +1316,76 @@
 </file>
 
 <file path=ppt/notesSlides/notesSlide12.xml><?xml version="1.0" encoding="utf-8"?>
+<p:notes xmlns:a="http://schemas.openxmlformats.org/drawingml/2006/main" xmlns:r="http://schemas.openxmlformats.org/officeDocument/2006/relationships" xmlns:p="http://schemas.openxmlformats.org/presentationml/2006/main">
+  <p:cSld>
+    <p:spTree>
+      <p:nvGrpSpPr>
+        <p:cNvPr id="1" name=""/>
+        <p:cNvGrpSpPr/>
+        <p:nvPr/>
+      </p:nvGrpSpPr>
+      <p:grpSpPr>
+        <a:xfrm>
+          <a:off x="0" y="0"/>
+          <a:ext cx="0" cy="0"/>
+          <a:chOff x="0" y="0"/>
+          <a:chExt cx="0" cy="0"/>
+        </a:xfrm>
+      </p:grpSpPr>
+      <p:sp>
+        <p:nvSpPr>
+          <p:cNvPr id="2" name="Образ слайда 1"/>
+          <p:cNvSpPr>
+            <a:spLocks noGrp="1" noRot="1" noChangeAspect="1"/>
+          </p:cNvSpPr>
+          <p:nvPr>
+            <p:ph type="sldImg"/>
+          </p:nvPr>
+        </p:nvSpPr>
+        <p:spPr>
+          <a:xfrm>
+            <a:off x="381000" y="685800"/>
+            <a:ext cx="6096000" cy="3429000"/>
+          </a:xfrm>
+        </p:spPr>
+      </p:sp>
+      <p:sp>
+        <p:nvSpPr>
+          <p:cNvPr id="3" name="Заметки 2"/>
+          <p:cNvSpPr>
+            <a:spLocks noGrp="1"/>
+          </p:cNvSpPr>
+          <p:nvPr>
+            <p:ph type="body" idx="1"/>
+          </p:nvPr>
+        </p:nvSpPr>
+        <p:spPr/>
+        <p:txBody>
+          <a:bodyPr/>
+          <a:lstStyle/>
+          <a:p>
+            <a:r>
+              <a:rPr lang="en-US" dirty="0"/>
+              <a:t>Maybe using target base method provide better calibration </a:t>
+            </a:r>
+            <a:endParaRPr lang="ru-RU" dirty="0"/>
+          </a:p>
+        </p:txBody>
+      </p:sp>
+    </p:spTree>
+    <p:extLst>
+      <p:ext uri="{BB962C8B-B14F-4D97-AF65-F5344CB8AC3E}">
+        <p14:creationId xmlns:p14="http://schemas.microsoft.com/office/powerpoint/2010/main" val="1490394131"/>
+      </p:ext>
+    </p:extLst>
+  </p:cSld>
+  <p:clrMapOvr>
+    <a:masterClrMapping/>
+  </p:clrMapOvr>
+</p:notes>
+</file>
+
+<file path=ppt/notesSlides/notesSlide13.xml><?xml version="1.0" encoding="utf-8"?>
 <p:notes xmlns:a="http://schemas.openxmlformats.org/drawingml/2006/main" xmlns:r="http://schemas.openxmlformats.org/officeDocument/2006/relationships" xmlns:p="http://schemas.openxmlformats.org/presentationml/2006/main" showMasterSp="0" showMasterPhAnim="0">
   <p:cSld>
     <p:spTree>
@@ -1476,7 +1547,7 @@
 </p:notes>
 </file>
 
-<file path=ppt/notesSlides/notesSlide13.xml><?xml version="1.0" encoding="utf-8"?>
+<file path=ppt/notesSlides/notesSlide14.xml><?xml version="1.0" encoding="utf-8"?>
 <p:notes xmlns:a="http://schemas.openxmlformats.org/drawingml/2006/main" xmlns:r="http://schemas.openxmlformats.org/officeDocument/2006/relationships" xmlns:p="http://schemas.openxmlformats.org/presentationml/2006/main" showMasterSp="0" showMasterPhAnim="0">
   <p:cSld>
     <p:spTree>
@@ -1638,7 +1709,7 @@
 </p:notes>
 </file>
 
-<file path=ppt/notesSlides/notesSlide14.xml><?xml version="1.0" encoding="utf-8"?>
+<file path=ppt/notesSlides/notesSlide15.xml><?xml version="1.0" encoding="utf-8"?>
 <p:notes xmlns:a="http://schemas.openxmlformats.org/drawingml/2006/main" xmlns:r="http://schemas.openxmlformats.org/officeDocument/2006/relationships" xmlns:p="http://schemas.openxmlformats.org/presentationml/2006/main">
   <p:cSld>
     <p:spTree>
@@ -8297,7 +8368,7 @@
               <a:buNone/>
             </a:pPr>
             <a:r>
-              <a:rPr lang="en-US" dirty="0">
+              <a:rPr lang="en-US" sz="1600" dirty="0">
                 <a:solidFill>
                   <a:schemeClr val="tx1"/>
                 </a:solidFill>
@@ -8310,7 +8381,7 @@
               <a:buNone/>
             </a:pPr>
             <a:r>
-              <a:rPr lang="en-US" dirty="0">
+              <a:rPr lang="en-US" sz="1600" dirty="0">
                 <a:solidFill>
                   <a:schemeClr val="tx1"/>
                 </a:solidFill>
@@ -8323,7 +8394,7 @@
               <a:buNone/>
             </a:pPr>
             <a:r>
-              <a:rPr lang="en-US" dirty="0">
+              <a:rPr lang="en-US" sz="1600" dirty="0">
                 <a:solidFill>
                   <a:schemeClr val="tx1"/>
                 </a:solidFill>
@@ -8336,7 +8407,7 @@
               <a:buNone/>
             </a:pPr>
             <a:r>
-              <a:rPr lang="en-US" dirty="0">
+              <a:rPr lang="en-US" sz="1600" dirty="0">
                 <a:solidFill>
                   <a:schemeClr val="tx1"/>
                 </a:solidFill>
@@ -8348,7 +8419,7 @@
             <a:pPr marL="0" lvl="0" indent="0">
               <a:buNone/>
             </a:pPr>
-            <a:endParaRPr lang="en-US" dirty="0">
+            <a:endParaRPr lang="en-US" sz="1600" dirty="0">
               <a:solidFill>
                 <a:schemeClr val="tx1"/>
               </a:solidFill>
@@ -8359,7 +8430,7 @@
               <a:buNone/>
             </a:pPr>
             <a:r>
-              <a:rPr lang="en-US" dirty="0">
+              <a:rPr lang="en-US" sz="1600" dirty="0">
                 <a:solidFill>
                   <a:schemeClr val="tx1"/>
                 </a:solidFill>
@@ -8368,24 +8439,56 @@
             </a:r>
           </a:p>
           <a:p>
+            <a:pPr marL="0" indent="0">
+              <a:buNone/>
+            </a:pPr>
+            <a:r>
+              <a:rPr lang="en-US" sz="1600" dirty="0">
+                <a:solidFill>
+                  <a:schemeClr val="tx1"/>
+                </a:solidFill>
+              </a:rPr>
+              <a:t>• use targetless automatic calibration as a first step (</a:t>
+            </a:r>
+            <a:r>
+              <a:rPr lang="en-US" sz="1600" dirty="0" err="1">
+                <a:solidFill>
+                  <a:schemeClr val="tx1"/>
+                </a:solidFill>
+              </a:rPr>
+              <a:t>SuperGlue</a:t>
+            </a:r>
+            <a:r>
+              <a:rPr lang="en-US" sz="1600" dirty="0">
+                <a:solidFill>
+                  <a:schemeClr val="tx1"/>
+                </a:solidFill>
+              </a:rPr>
+              <a:t> </a:t>
+            </a:r>
+            <a:r>
+              <a:rPr lang="en-US" sz="1600" b="1" dirty="0"/>
+              <a:t> </a:t>
+            </a:r>
+            <a:r>
+              <a:rPr lang="en-US" sz="1600" dirty="0"/>
+              <a:t>Scene-based methods</a:t>
+            </a:r>
+            <a:r>
+              <a:rPr lang="en-US" sz="1600" dirty="0">
+                <a:solidFill>
+                  <a:schemeClr val="tx1"/>
+                </a:solidFill>
+              </a:rPr>
+              <a:t>)</a:t>
+            </a:r>
+          </a:p>
+          <a:p>
             <a:pPr marL="0" lvl="0" indent="0">
               <a:buNone/>
             </a:pPr>
             <a:r>
-              <a:rPr lang="en-US" dirty="0">
-                <a:solidFill>
-                  <a:schemeClr val="tx1"/>
-                </a:solidFill>
-              </a:rPr>
-              <a:t>• use targetless automatic calibration as a first step</a:t>
-            </a:r>
-          </a:p>
-          <a:p>
-            <a:pPr marL="0" lvl="0" indent="0">
-              <a:buNone/>
-            </a:pPr>
-            <a:r>
-              <a:rPr lang="en-US" dirty="0">
+              <a:rPr lang="en-US" sz="1600" dirty="0">
                 <a:solidFill>
                   <a:schemeClr val="tx1"/>
                 </a:solidFill>
@@ -8397,27 +8500,21 @@
             <a:pPr marL="0" lvl="0" indent="0">
               <a:buNone/>
             </a:pPr>
-            <a:r>
-              <a:rPr lang="en-US" dirty="0">
-                <a:solidFill>
-                  <a:schemeClr val="tx1"/>
-                </a:solidFill>
-              </a:rPr>
-              <a:t>• check time synchronization</a:t>
-            </a:r>
+            <a:endParaRPr lang="en-US" sz="1600" dirty="0">
+              <a:solidFill>
+                <a:schemeClr val="tx1"/>
+              </a:solidFill>
+            </a:endParaRPr>
           </a:p>
           <a:p>
             <a:pPr marL="0" lvl="0" indent="0">
               <a:buNone/>
             </a:pPr>
-            <a:r>
-              <a:rPr lang="en-US" dirty="0">
-                <a:solidFill>
-                  <a:schemeClr val="tx1"/>
-                </a:solidFill>
-              </a:rPr>
-              <a:t>• use manual or target-based refinement if needed</a:t>
-            </a:r>
+            <a:endParaRPr lang="en-US" sz="1600" dirty="0">
+              <a:solidFill>
+                <a:schemeClr val="tx1"/>
+              </a:solidFill>
+            </a:endParaRPr>
           </a:p>
         </p:txBody>
       </p:sp>
@@ -8430,6 +8527,126 @@
 </file>
 
 <file path=ppt/slides/slide14.xml><?xml version="1.0" encoding="utf-8"?>
+<p:sld xmlns:a="http://schemas.openxmlformats.org/drawingml/2006/main" xmlns:r="http://schemas.openxmlformats.org/officeDocument/2006/relationships" xmlns:p="http://schemas.openxmlformats.org/presentationml/2006/main">
+  <p:cSld>
+    <p:spTree>
+      <p:nvGrpSpPr>
+        <p:cNvPr id="1" name=""/>
+        <p:cNvGrpSpPr/>
+        <p:nvPr/>
+      </p:nvGrpSpPr>
+      <p:grpSpPr>
+        <a:xfrm>
+          <a:off x="0" y="0"/>
+          <a:ext cx="0" cy="0"/>
+          <a:chOff x="0" y="0"/>
+          <a:chExt cx="0" cy="0"/>
+        </a:xfrm>
+      </p:grpSpPr>
+      <p:sp>
+        <p:nvSpPr>
+          <p:cNvPr id="2" name="Заголовок 1">
+            <a:extLst>
+              <a:ext uri="{FF2B5EF4-FFF2-40B4-BE49-F238E27FC236}">
+                <a16:creationId xmlns:a16="http://schemas.microsoft.com/office/drawing/2014/main" id="{C3B847B6-BDA5-753D-6EC6-DE0C0136697D}"/>
+              </a:ext>
+            </a:extLst>
+          </p:cNvPr>
+          <p:cNvSpPr>
+            <a:spLocks noGrp="1"/>
+          </p:cNvSpPr>
+          <p:nvPr>
+            <p:ph type="title"/>
+          </p:nvPr>
+        </p:nvSpPr>
+        <p:spPr/>
+        <p:txBody>
+          <a:bodyPr>
+            <a:normAutofit fontScale="90000"/>
+          </a:bodyPr>
+          <a:lstStyle/>
+          <a:p>
+            <a:r>
+              <a:rPr lang="en-US" dirty="0"/>
+              <a:t>Camera-LiDAR Calibration for Label Transfer</a:t>
+            </a:r>
+            <a:endParaRPr lang="ru-RU" dirty="0"/>
+          </a:p>
+        </p:txBody>
+      </p:sp>
+      <p:sp>
+        <p:nvSpPr>
+          <p:cNvPr id="3" name="Текст 2">
+            <a:extLst>
+              <a:ext uri="{FF2B5EF4-FFF2-40B4-BE49-F238E27FC236}">
+                <a16:creationId xmlns:a16="http://schemas.microsoft.com/office/drawing/2014/main" id="{9986CE49-508D-3171-378C-76742289411F}"/>
+              </a:ext>
+            </a:extLst>
+          </p:cNvPr>
+          <p:cNvSpPr>
+            <a:spLocks noGrp="1"/>
+          </p:cNvSpPr>
+          <p:nvPr>
+            <p:ph type="body" idx="1"/>
+          </p:nvPr>
+        </p:nvSpPr>
+        <p:spPr/>
+        <p:txBody>
+          <a:bodyPr/>
+          <a:lstStyle/>
+          <a:p>
+            <a:pPr marL="114300" indent="0">
+              <a:buNone/>
+            </a:pPr>
+            <a:r>
+              <a:rPr lang="en-US" dirty="0" err="1"/>
+              <a:t>SuperGlue</a:t>
+            </a:r>
+            <a:r>
+              <a:rPr lang="en-US" dirty="0"/>
+              <a:t> is scene-base method was used for calibration, it’s provide better result then, manual calibration. </a:t>
+            </a:r>
+          </a:p>
+          <a:p>
+            <a:pPr marL="114300" indent="0">
+              <a:buNone/>
+            </a:pPr>
+            <a:endParaRPr lang="en-US" dirty="0"/>
+          </a:p>
+          <a:p>
+            <a:pPr marL="114300" indent="0">
+              <a:buNone/>
+            </a:pPr>
+            <a:r>
+              <a:rPr lang="en-US" dirty="0">
+                <a:solidFill>
+                  <a:srgbClr val="FF0000"/>
+                </a:solidFill>
+              </a:rPr>
+              <a:t>FIG</a:t>
+            </a:r>
+            <a:endParaRPr lang="ru-RU" dirty="0">
+              <a:solidFill>
+                <a:srgbClr val="FF0000"/>
+              </a:solidFill>
+            </a:endParaRPr>
+          </a:p>
+        </p:txBody>
+      </p:sp>
+    </p:spTree>
+    <p:extLst>
+      <p:ext uri="{BB962C8B-B14F-4D97-AF65-F5344CB8AC3E}">
+        <p14:creationId xmlns:p14="http://schemas.microsoft.com/office/powerpoint/2010/main" val="2741102107"/>
+      </p:ext>
+    </p:extLst>
+  </p:cSld>
+  <p:clrMapOvr>
+    <a:masterClrMapping/>
+  </p:clrMapOvr>
+</p:sld>
+</file>
+
+<file path=ppt/slides/slide15.xml><?xml version="1.0" encoding="utf-8"?>
 <p:sld xmlns:a="http://schemas.openxmlformats.org/drawingml/2006/main" xmlns:r="http://schemas.openxmlformats.org/officeDocument/2006/relationships" xmlns:p="http://schemas.openxmlformats.org/presentationml/2006/main">
   <p:cSld>
     <p:spTree>
@@ -8759,7 +8976,7 @@
 </p:sld>
 </file>
 
-<file path=ppt/slides/slide15.xml><?xml version="1.0" encoding="utf-8"?>
+<file path=ppt/slides/slide16.xml><?xml version="1.0" encoding="utf-8"?>
 <p:sld xmlns:a="http://schemas.openxmlformats.org/drawingml/2006/main" xmlns:r="http://schemas.openxmlformats.org/officeDocument/2006/relationships" xmlns:p="http://schemas.openxmlformats.org/presentationml/2006/main">
   <p:cSld>
     <p:spTree>
@@ -8972,7 +9189,7 @@
           <a:p>
             <a:r>
               <a:rPr lang="en-US" dirty="0"/>
-              <a:t>• adhesive / attached noise</a:t>
+              <a:t>• adhesive(mix pixel ?) / attached noise </a:t>
             </a:r>
           </a:p>
           <a:p>
@@ -8992,7 +9209,7 @@
 </p:sld>
 </file>
 
-<file path=ppt/slides/slide16.xml><?xml version="1.0" encoding="utf-8"?>
+<file path=ppt/slides/slide17.xml><?xml version="1.0" encoding="utf-8"?>
 <p:sld xmlns:a="http://schemas.openxmlformats.org/drawingml/2006/main" xmlns:r="http://schemas.openxmlformats.org/officeDocument/2006/relationships" xmlns:p="http://schemas.openxmlformats.org/presentationml/2006/main">
   <p:cSld>
     <p:spTree>
@@ -9176,7 +9393,23 @@
                   <a:schemeClr val="tx1"/>
                 </a:solidFill>
               </a:rPr>
-              <a:t>• point / voxel segmentation backbone for coarse families</a:t>
+              <a:t>• point / voxel segmentation backbone for coarse families (PTv3, </a:t>
+            </a:r>
+            <a:r>
+              <a:rPr lang="en-US" dirty="0" err="1">
+                <a:solidFill>
+                  <a:schemeClr val="tx1"/>
+                </a:solidFill>
+              </a:rPr>
+              <a:t>LitePT</a:t>
+            </a:r>
+            <a:r>
+              <a:rPr lang="en-US" dirty="0">
+                <a:solidFill>
+                  <a:schemeClr val="tx1"/>
+                </a:solidFill>
+              </a:rPr>
+              <a:t>)</a:t>
             </a:r>
             <a:br>
               <a:rPr lang="en-US" dirty="0">
